--- a/3-Master_Plan/re_entry/HEROs_and_PASSes/slides/auto/CHAR_PD22_ppm_distribution_AUTO.pptx
+++ b/3-Master_Plan/re_entry/HEROs_and_PASSes/slides/auto/CHAR_PD22_ppm_distribution_AUTO.pptx
@@ -3312,7 +3312,7 @@
               <a:rPr sz="1000" b="0" i="0" baseline="0">
                 <a:latin typeface="Calibri"/>
               </a:rPr>
-              <a:t>  Item 4 (right): hero panel $n =$ $46,306$ — raw PPM then PPM z within season (PD21 ASSIGN ability; empirical roster caps are separate).</a:t>
+              <a:t>  Item 4 (right): hero panel $n = 46,306$ — raw PPM then PPM z within season (PD21 ASSIGN ability; empirical roster caps are separate).</a:t>
             </a:r>
           </a:p>
           <a:p>
@@ -3404,7 +3404,7 @@
               <a:rPr sz="1100" b="1" i="0" baseline="0">
                 <a:latin typeface="Calibri"/>
               </a:rPr>
-              <a:t>Claim (Alex, PD22): Minutes floor guards against noisy PPM tails — sub-20-min rows include extreme points-per-minute spikes; hero ASSIGN uses PPM z-scored within season on the min-20 panel.</a:t>
+              <a:t>Claim (PD22): Minutes floor guards against noisy PPM tails — sub-20-min rows include extreme points-per-minute spikes; hero ASSIGN uses PPM z-scored within season on the min-20 panel.</a:t>
             </a:r>
           </a:p>
         </p:txBody>
